--- a/05-midterm-report/figures/fig-2-data-flow.pptx
+++ b/05-midterm-report/figures/fig-2-data-flow.pptx
@@ -895,13 +895,13 @@
             <a:r>
               <a:rPr lang="en-US" sz="1800" b="1" dirty="0">
                 <a:solidFill>
-                  <a:srgbClr val="1E293B"/>
-                </a:solidFill>
-                <a:latin typeface="맑은 고딕" pitchFamily="34" charset="0"/>
-                <a:ea typeface="맑은 고딕" pitchFamily="34" charset="-122"/>
-                <a:cs typeface="맑은 고딕" pitchFamily="34" charset="-120"/>
-              </a:rPr>
-              <a:t>그림 3. 데이터 흐름도</a:t>
+                  <a:srgbClr val="1A1A1A"/>
+                </a:solidFill>
+                <a:latin typeface="맑은 고딕" pitchFamily="34" charset="0"/>
+                <a:ea typeface="맑은 고딕" pitchFamily="34" charset="-122"/>
+                <a:cs typeface="맑은 고딕" pitchFamily="34" charset="-120"/>
+              </a:rPr>
+              <a:t>그림 2. 데이터 흐름도</a:t>
             </a:r>
             <a:endParaRPr lang="en-US" sz="1800" dirty="0"/>
           </a:p>
@@ -924,13 +924,13 @@
             </a:avLst>
           </a:prstGeom>
           <a:solidFill>
-            <a:srgbClr val="2563EB">
+            <a:srgbClr val="1B3A5C">
               <a:alpha val="15000"/>
             </a:srgbClr>
           </a:solidFill>
           <a:ln w="19050">
             <a:solidFill>
-              <a:srgbClr val="2563EB"/>
+              <a:srgbClr val="1B3A5C"/>
             </a:solidFill>
             <a:prstDash val="solid"/>
           </a:ln>
@@ -963,7 +963,7 @@
             <a:r>
               <a:rPr lang="en-US" sz="1000" b="1" dirty="0">
                 <a:solidFill>
-                  <a:srgbClr val="2563EB"/>
+                  <a:srgbClr val="1B3A5C"/>
                 </a:solidFill>
                 <a:latin typeface="맑은 고딕" pitchFamily="34" charset="0"/>
                 <a:ea typeface="맑은 고딕" pitchFamily="34" charset="-122"/>
@@ -1002,7 +1002,7 @@
             <a:r>
               <a:rPr lang="en-US" sz="900" dirty="0">
                 <a:solidFill>
-                  <a:srgbClr val="64748B"/>
+                  <a:srgbClr val="4A5568"/>
                 </a:solidFill>
                 <a:latin typeface="맑은 고딕" pitchFamily="34" charset="0"/>
                 <a:ea typeface="맑은 고딕" pitchFamily="34" charset="-122"/>
@@ -1031,7 +1031,7 @@
             </a:avLst>
           </a:prstGeom>
           <a:solidFill>
-            <a:srgbClr val="2563EB">
+            <a:srgbClr val="1B3A5C">
               <a:alpha val="30000"/>
             </a:srgbClr>
           </a:solidFill>
@@ -1070,7 +1070,7 @@
             <a:r>
               <a:rPr lang="en-US" sz="700" b="1" dirty="0">
                 <a:solidFill>
-                  <a:srgbClr val="2563EB"/>
+                  <a:srgbClr val="1B3A5C"/>
                 </a:solidFill>
                 <a:latin typeface="맑은 고딕" pitchFamily="34" charset="0"/>
                 <a:ea typeface="맑은 고딕" pitchFamily="34" charset="-122"/>
@@ -1099,13 +1099,13 @@
             </a:avLst>
           </a:prstGeom>
           <a:solidFill>
-            <a:srgbClr val="059669">
+            <a:srgbClr val="2D6A4F">
               <a:alpha val="15000"/>
             </a:srgbClr>
           </a:solidFill>
           <a:ln w="19050">
             <a:solidFill>
-              <a:srgbClr val="059669"/>
+              <a:srgbClr val="2D6A4F"/>
             </a:solidFill>
             <a:prstDash val="solid"/>
           </a:ln>
@@ -1138,7 +1138,7 @@
             <a:r>
               <a:rPr lang="en-US" sz="1000" b="1" dirty="0">
                 <a:solidFill>
-                  <a:srgbClr val="059669"/>
+                  <a:srgbClr val="2D6A4F"/>
                 </a:solidFill>
                 <a:latin typeface="맑은 고딕" pitchFamily="34" charset="0"/>
                 <a:ea typeface="맑은 고딕" pitchFamily="34" charset="-122"/>
@@ -1177,7 +1177,7 @@
             <a:r>
               <a:rPr lang="en-US" sz="900" dirty="0">
                 <a:solidFill>
-                  <a:srgbClr val="64748B"/>
+                  <a:srgbClr val="4A5568"/>
                 </a:solidFill>
                 <a:latin typeface="맑은 고딕" pitchFamily="34" charset="0"/>
                 <a:ea typeface="맑은 고딕" pitchFamily="34" charset="-122"/>
@@ -1206,7 +1206,7 @@
             </a:avLst>
           </a:prstGeom>
           <a:solidFill>
-            <a:srgbClr val="059669">
+            <a:srgbClr val="2D6A4F">
               <a:alpha val="30000"/>
             </a:srgbClr>
           </a:solidFill>
@@ -1245,7 +1245,7 @@
             <a:r>
               <a:rPr lang="en-US" sz="700" b="1" dirty="0">
                 <a:solidFill>
-                  <a:srgbClr val="059669"/>
+                  <a:srgbClr val="2D6A4F"/>
                 </a:solidFill>
                 <a:latin typeface="맑은 고딕" pitchFamily="34" charset="0"/>
                 <a:ea typeface="맑은 고딕" pitchFamily="34" charset="-122"/>
@@ -1274,13 +1274,13 @@
             </a:avLst>
           </a:prstGeom>
           <a:solidFill>
-            <a:srgbClr val="D97706">
+            <a:srgbClr val="7C4D1A">
               <a:alpha val="15000"/>
             </a:srgbClr>
           </a:solidFill>
           <a:ln w="19050">
             <a:solidFill>
-              <a:srgbClr val="D97706"/>
+              <a:srgbClr val="7C4D1A"/>
             </a:solidFill>
             <a:prstDash val="solid"/>
           </a:ln>
@@ -1313,7 +1313,7 @@
             <a:r>
               <a:rPr lang="en-US" sz="1000" b="1" dirty="0">
                 <a:solidFill>
-                  <a:srgbClr val="D97706"/>
+                  <a:srgbClr val="7C4D1A"/>
                 </a:solidFill>
                 <a:latin typeface="맑은 고딕" pitchFamily="34" charset="0"/>
                 <a:ea typeface="맑은 고딕" pitchFamily="34" charset="-122"/>
@@ -1352,7 +1352,7 @@
             <a:r>
               <a:rPr lang="en-US" sz="900" dirty="0">
                 <a:solidFill>
-                  <a:srgbClr val="64748B"/>
+                  <a:srgbClr val="4A5568"/>
                 </a:solidFill>
                 <a:latin typeface="맑은 고딕" pitchFamily="34" charset="0"/>
                 <a:ea typeface="맑은 고딕" pitchFamily="34" charset="-122"/>
@@ -1381,7 +1381,7 @@
             </a:avLst>
           </a:prstGeom>
           <a:solidFill>
-            <a:srgbClr val="D97706">
+            <a:srgbClr val="7C4D1A">
               <a:alpha val="30000"/>
             </a:srgbClr>
           </a:solidFill>
@@ -1420,7 +1420,7 @@
             <a:r>
               <a:rPr lang="en-US" sz="700" b="1" dirty="0">
                 <a:solidFill>
-                  <a:srgbClr val="D97706"/>
+                  <a:srgbClr val="7C4D1A"/>
                 </a:solidFill>
                 <a:latin typeface="맑은 고딕" pitchFamily="34" charset="0"/>
                 <a:ea typeface="맑은 고딕" pitchFamily="34" charset="-122"/>
@@ -1449,13 +1449,13 @@
             </a:avLst>
           </a:prstGeom>
           <a:solidFill>
-            <a:srgbClr val="D97706">
+            <a:srgbClr val="7C4D1A">
               <a:alpha val="15000"/>
             </a:srgbClr>
           </a:solidFill>
           <a:ln w="19050">
             <a:solidFill>
-              <a:srgbClr val="D97706"/>
+              <a:srgbClr val="7C4D1A"/>
             </a:solidFill>
             <a:prstDash val="solid"/>
           </a:ln>
@@ -1488,7 +1488,7 @@
             <a:r>
               <a:rPr lang="en-US" sz="1000" b="1" dirty="0">
                 <a:solidFill>
-                  <a:srgbClr val="D97706"/>
+                  <a:srgbClr val="7C4D1A"/>
                 </a:solidFill>
                 <a:latin typeface="맑은 고딕" pitchFamily="34" charset="0"/>
                 <a:ea typeface="맑은 고딕" pitchFamily="34" charset="-122"/>
@@ -1527,7 +1527,7 @@
             <a:r>
               <a:rPr lang="en-US" sz="900" dirty="0">
                 <a:solidFill>
-                  <a:srgbClr val="64748B"/>
+                  <a:srgbClr val="4A5568"/>
                 </a:solidFill>
                 <a:latin typeface="맑은 고딕" pitchFamily="34" charset="0"/>
                 <a:ea typeface="맑은 고딕" pitchFamily="34" charset="-122"/>
@@ -1556,7 +1556,7 @@
             </a:avLst>
           </a:prstGeom>
           <a:solidFill>
-            <a:srgbClr val="D97706">
+            <a:srgbClr val="7C4D1A">
               <a:alpha val="30000"/>
             </a:srgbClr>
           </a:solidFill>
@@ -1595,7 +1595,7 @@
             <a:r>
               <a:rPr lang="en-US" sz="700" b="1" dirty="0">
                 <a:solidFill>
-                  <a:srgbClr val="D97706"/>
+                  <a:srgbClr val="7C4D1A"/>
                 </a:solidFill>
                 <a:latin typeface="맑은 고딕" pitchFamily="34" charset="0"/>
                 <a:ea typeface="맑은 고딕" pitchFamily="34" charset="-122"/>
@@ -1624,13 +1624,13 @@
             </a:avLst>
           </a:prstGeom>
           <a:solidFill>
-            <a:srgbClr val="2563EB">
+            <a:srgbClr val="1B3A5C">
               <a:alpha val="15000"/>
             </a:srgbClr>
           </a:solidFill>
           <a:ln w="19050">
             <a:solidFill>
-              <a:srgbClr val="2563EB"/>
+              <a:srgbClr val="1B3A5C"/>
             </a:solidFill>
             <a:prstDash val="solid"/>
           </a:ln>
@@ -1663,7 +1663,7 @@
             <a:r>
               <a:rPr lang="en-US" sz="1000" b="1" dirty="0">
                 <a:solidFill>
-                  <a:srgbClr val="2563EB"/>
+                  <a:srgbClr val="1B3A5C"/>
                 </a:solidFill>
                 <a:latin typeface="맑은 고딕" pitchFamily="34" charset="0"/>
                 <a:ea typeface="맑은 고딕" pitchFamily="34" charset="-122"/>
@@ -1702,7 +1702,7 @@
             <a:r>
               <a:rPr lang="en-US" sz="900" dirty="0">
                 <a:solidFill>
-                  <a:srgbClr val="64748B"/>
+                  <a:srgbClr val="4A5568"/>
                 </a:solidFill>
                 <a:latin typeface="맑은 고딕" pitchFamily="34" charset="0"/>
                 <a:ea typeface="맑은 고딕" pitchFamily="34" charset="-122"/>
@@ -1731,7 +1731,7 @@
             </a:avLst>
           </a:prstGeom>
           <a:solidFill>
-            <a:srgbClr val="2563EB">
+            <a:srgbClr val="1B3A5C">
               <a:alpha val="30000"/>
             </a:srgbClr>
           </a:solidFill>
@@ -1770,7 +1770,7 @@
             <a:r>
               <a:rPr lang="en-US" sz="700" b="1" dirty="0">
                 <a:solidFill>
-                  <a:srgbClr val="2563EB"/>
+                  <a:srgbClr val="1B3A5C"/>
                 </a:solidFill>
                 <a:latin typeface="맑은 고딕" pitchFamily="34" charset="0"/>
                 <a:ea typeface="맑은 고딕" pitchFamily="34" charset="-122"/>
@@ -1797,7 +1797,7 @@
             <a:avLst/>
           </a:prstGeom>
           <a:solidFill>
-            <a:srgbClr val="CBD5E1"/>
+            <a:srgbClr val="A0A0A0"/>
           </a:solidFill>
           <a:ln/>
         </p:spPr>
@@ -1817,7 +1817,7 @@
             <a:avLst/>
           </a:prstGeom>
           <a:solidFill>
-            <a:srgbClr val="CBD5E1"/>
+            <a:srgbClr val="A0A0A0"/>
           </a:solidFill>
           <a:ln/>
         </p:spPr>
@@ -1837,7 +1837,7 @@
             <a:avLst/>
           </a:prstGeom>
           <a:solidFill>
-            <a:srgbClr val="CBD5E1"/>
+            <a:srgbClr val="A0A0A0"/>
           </a:solidFill>
           <a:ln/>
         </p:spPr>
@@ -1857,7 +1857,7 @@
             <a:avLst/>
           </a:prstGeom>
           <a:solidFill>
-            <a:srgbClr val="CBD5E1"/>
+            <a:srgbClr val="A0A0A0"/>
           </a:solidFill>
           <a:ln/>
         </p:spPr>
@@ -1877,7 +1877,7 @@
             <a:avLst/>
           </a:prstGeom>
           <a:solidFill>
-            <a:srgbClr val="CBD5E1"/>
+            <a:srgbClr val="A0A0A0"/>
           </a:solidFill>
           <a:ln/>
         </p:spPr>
@@ -1899,13 +1899,13 @@
             </a:avLst>
           </a:prstGeom>
           <a:solidFill>
-            <a:srgbClr val="059669">
+            <a:srgbClr val="2D6A4F">
               <a:alpha val="15000"/>
             </a:srgbClr>
           </a:solidFill>
           <a:ln w="19050">
             <a:solidFill>
-              <a:srgbClr val="059669"/>
+              <a:srgbClr val="2D6A4F"/>
             </a:solidFill>
             <a:prstDash val="solid"/>
           </a:ln>
@@ -1938,7 +1938,7 @@
             <a:r>
               <a:rPr lang="en-US" sz="1100" b="1" dirty="0">
                 <a:solidFill>
-                  <a:srgbClr val="059669"/>
+                  <a:srgbClr val="2D6A4F"/>
                 </a:solidFill>
                 <a:latin typeface="맑은 고딕" pitchFamily="34" charset="0"/>
                 <a:ea typeface="맑은 고딕" pitchFamily="34" charset="-122"/>
@@ -1977,7 +1977,7 @@
             <a:r>
               <a:rPr lang="en-US" sz="900" dirty="0">
                 <a:solidFill>
-                  <a:srgbClr val="64748B"/>
+                  <a:srgbClr val="4A5568"/>
                 </a:solidFill>
                 <a:latin typeface="맑은 고딕" pitchFamily="34" charset="0"/>
                 <a:ea typeface="맑은 고딕" pitchFamily="34" charset="-122"/>
@@ -2006,7 +2006,7 @@
             </a:avLst>
           </a:prstGeom>
           <a:solidFill>
-            <a:srgbClr val="059669">
+            <a:srgbClr val="2D6A4F">
               <a:alpha val="30000"/>
             </a:srgbClr>
           </a:solidFill>
@@ -2045,7 +2045,7 @@
             <a:r>
               <a:rPr lang="en-US" sz="700" b="1" dirty="0">
                 <a:solidFill>
-                  <a:srgbClr val="059669"/>
+                  <a:srgbClr val="2D6A4F"/>
                 </a:solidFill>
                 <a:latin typeface="맑은 고딕" pitchFamily="34" charset="0"/>
                 <a:ea typeface="맑은 고딕" pitchFamily="34" charset="-122"/>
@@ -2072,7 +2072,7 @@
             <a:avLst/>
           </a:prstGeom>
           <a:solidFill>
-            <a:srgbClr val="CBD5E1"/>
+            <a:srgbClr val="A0A0A0"/>
           </a:solidFill>
           <a:ln w="12700">
             <a:solidFill>
@@ -2097,7 +2097,7 @@
             <a:avLst/>
           </a:prstGeom>
           <a:solidFill>
-            <a:srgbClr val="D97706">
+            <a:srgbClr val="7C4D1A">
               <a:alpha val="60000"/>
             </a:srgbClr>
           </a:solidFill>
@@ -2131,7 +2131,7 @@
             <a:r>
               <a:rPr lang="en-US" sz="800" i="1" dirty="0">
                 <a:solidFill>
-                  <a:srgbClr val="64748B"/>
+                  <a:srgbClr val="4A5568"/>
                 </a:solidFill>
                 <a:latin typeface="맑은 고딕" pitchFamily="34" charset="0"/>
                 <a:ea typeface="맑은 고딕" pitchFamily="34" charset="-122"/>
@@ -2160,11 +2160,11 @@
             </a:avLst>
           </a:prstGeom>
           <a:solidFill>
-            <a:srgbClr val="F1F5F9"/>
+            <a:srgbClr val="F0F0F0"/>
           </a:solidFill>
           <a:ln w="12700">
             <a:solidFill>
-              <a:srgbClr val="CBD5E1"/>
+              <a:srgbClr val="A0A0A0"/>
             </a:solidFill>
             <a:prstDash val="dash"/>
           </a:ln>
@@ -2197,7 +2197,7 @@
             <a:r>
               <a:rPr lang="en-US" sz="1000" b="1" dirty="0">
                 <a:solidFill>
-                  <a:srgbClr val="1E293B"/>
+                  <a:srgbClr val="1A1A1A"/>
                 </a:solidFill>
                 <a:latin typeface="맑은 고딕" pitchFamily="34" charset="0"/>
                 <a:ea typeface="맑은 고딕" pitchFamily="34" charset="-122"/>
@@ -2212,7 +2212,7 @@
             <a:r>
               <a:rPr lang="en-US" sz="900" b="1" dirty="0">
                 <a:solidFill>
-                  <a:srgbClr val="2563EB"/>
+                  <a:srgbClr val="1B3A5C"/>
                 </a:solidFill>
                 <a:latin typeface="맑은 고딕" pitchFamily="34" charset="0"/>
                 <a:ea typeface="맑은 고딕" pitchFamily="34" charset="-122"/>
@@ -2226,7 +2226,7 @@
             <a:r>
               <a:rPr lang="en-US" sz="900" dirty="0">
                 <a:solidFill>
-                  <a:srgbClr val="64748B"/>
+                  <a:srgbClr val="4A5568"/>
                 </a:solidFill>
                 <a:latin typeface="맑은 고딕" pitchFamily="34" charset="0"/>
                 <a:ea typeface="맑은 고딕" pitchFamily="34" charset="-122"/>
@@ -2240,7 +2240,7 @@
             <a:r>
               <a:rPr lang="en-US" sz="900" b="1" dirty="0">
                 <a:solidFill>
-                  <a:srgbClr val="D97706"/>
+                  <a:srgbClr val="7C4D1A"/>
                 </a:solidFill>
                 <a:latin typeface="맑은 고딕" pitchFamily="34" charset="0"/>
                 <a:ea typeface="맑은 고딕" pitchFamily="34" charset="-122"/>
@@ -2254,7 +2254,7 @@
             <a:r>
               <a:rPr lang="en-US" sz="900" dirty="0">
                 <a:solidFill>
-                  <a:srgbClr val="64748B"/>
+                  <a:srgbClr val="4A5568"/>
                 </a:solidFill>
                 <a:latin typeface="맑은 고딕" pitchFamily="34" charset="0"/>
                 <a:ea typeface="맑은 고딕" pitchFamily="34" charset="-122"/>
@@ -2268,7 +2268,7 @@
             <a:r>
               <a:rPr lang="en-US" sz="900" b="1" dirty="0">
                 <a:solidFill>
-                  <a:srgbClr val="D97706"/>
+                  <a:srgbClr val="7C4D1A"/>
                 </a:solidFill>
                 <a:latin typeface="맑은 고딕" pitchFamily="34" charset="0"/>
                 <a:ea typeface="맑은 고딕" pitchFamily="34" charset="-122"/>
@@ -2282,7 +2282,7 @@
             <a:r>
               <a:rPr lang="en-US" sz="900" dirty="0">
                 <a:solidFill>
-                  <a:srgbClr val="64748B"/>
+                  <a:srgbClr val="4A5568"/>
                 </a:solidFill>
                 <a:latin typeface="맑은 고딕" pitchFamily="34" charset="0"/>
                 <a:ea typeface="맑은 고딕" pitchFamily="34" charset="-122"/>
@@ -2296,7 +2296,7 @@
             <a:r>
               <a:rPr lang="en-US" sz="900" b="1" dirty="0">
                 <a:solidFill>
-                  <a:srgbClr val="059669"/>
+                  <a:srgbClr val="2D6A4F"/>
                 </a:solidFill>
                 <a:latin typeface="맑은 고딕" pitchFamily="34" charset="0"/>
                 <a:ea typeface="맑은 고딕" pitchFamily="34" charset="-122"/>
@@ -2316,7 +2316,7 @@
             <a:r>
               <a:rPr lang="en-US" sz="800" i="1" dirty="0">
                 <a:solidFill>
-                  <a:srgbClr val="64748B"/>
+                  <a:srgbClr val="4A5568"/>
                 </a:solidFill>
                 <a:latin typeface="맑은 고딕" pitchFamily="34" charset="0"/>
                 <a:ea typeface="맑은 고딕" pitchFamily="34" charset="-122"/>
